--- a/策划/UI相关.pptx
+++ b/策划/UI相关.pptx
@@ -18268,6 +18268,51 @@
               <a:t>如果还有全部骰子的重投机会，显示全部重投按钮</a:t>
             </a:r>
             <a:endParaRPr lang="zh-CN" altLang="en-US" sz="1200"/>
+          </a:p>
+        </p:txBody>
+      </p:sp>
+      <p:sp>
+        <p:nvSpPr>
+          <p:cNvPr id="9" name="文本框 8"/>
+          <p:cNvSpPr txBox="1"/>
+          <p:nvPr/>
+        </p:nvSpPr>
+        <p:spPr>
+          <a:xfrm>
+            <a:off x="8245475" y="4386580"/>
+            <a:ext cx="1806575" cy="368300"/>
+          </a:xfrm>
+          <a:prstGeom prst="rect">
+            <a:avLst/>
+          </a:prstGeom>
+          <a:noFill/>
+        </p:spPr>
+        <p:txBody>
+          <a:bodyPr wrap="square" rtlCol="0">
+            <a:spAutoFit/>
+          </a:bodyPr>
+          <a:p>
+            <a:r>
+              <a:rPr lang="zh-CN" altLang="en-US">
+                <a:solidFill>
+                  <a:schemeClr val="tx1"/>
+                </a:solidFill>
+              </a:rPr>
+              <a:t>当前结果：</a:t>
+            </a:r>
+            <a:r>
+              <a:rPr lang="en-US" altLang="zh-CN">
+                <a:solidFill>
+                  <a:schemeClr val="tx1"/>
+                </a:solidFill>
+              </a:rPr>
+              <a:t>10</a:t>
+            </a:r>
+            <a:endParaRPr lang="en-US" altLang="zh-CN">
+              <a:solidFill>
+                <a:schemeClr val="tx1"/>
+              </a:solidFill>
+            </a:endParaRPr>
           </a:p>
         </p:txBody>
       </p:sp>

--- a/策划/UI相关.pptx
+++ b/策划/UI相关.pptx
@@ -116,12 +116,12 @@
   <p:extLst>
     <p:ext uri="{EFAFB233-063F-42B5-8137-9DF3F51BA10A}">
       <p15:sldGuideLst xmlns:p15="http://schemas.microsoft.com/office/powerpoint/2012/main">
-        <p15:guide id="1" orient="horz" pos="2196" userDrawn="1">
+        <p15:guide id="1" orient="horz" pos="2234" userDrawn="1">
           <p15:clr>
             <a:srgbClr val="A4A3A4"/>
           </p15:clr>
         </p15:guide>
-        <p15:guide id="2" pos="3850" userDrawn="1">
+        <p15:guide id="2" pos="3849" userDrawn="1">
           <p15:clr>
             <a:srgbClr val="A4A3A4"/>
           </p15:clr>
@@ -6885,101 +6885,6 @@
       </p:sp>
       <p:sp>
         <p:nvSpPr>
-          <p:cNvPr id="26" name="文本框 25"/>
-          <p:cNvSpPr txBox="1"/>
-          <p:nvPr/>
-        </p:nvSpPr>
-        <p:spPr>
-          <a:xfrm>
-            <a:off x="255270" y="5992495"/>
-            <a:ext cx="5314950" cy="645160"/>
-          </a:xfrm>
-          <a:prstGeom prst="rect">
-            <a:avLst/>
-          </a:prstGeom>
-          <a:noFill/>
-        </p:spPr>
-        <p:txBody>
-          <a:bodyPr wrap="square" rtlCol="0">
-            <a:spAutoFit/>
-          </a:bodyPr>
-          <a:p>
-            <a:r>
-              <a:rPr lang="zh-CN" altLang="en-US"/>
-              <a:t>这个是强化页面，类似于出现的一个窗口吧，背景模糊，能看到后面的</a:t>
-            </a:r>
-            <a:r>
-              <a:rPr lang="en-US" altLang="zh-CN"/>
-              <a:t>UI</a:t>
-            </a:r>
-            <a:r>
-              <a:rPr lang="zh-CN" altLang="en-US"/>
-              <a:t>。</a:t>
-            </a:r>
-            <a:endParaRPr lang="zh-CN" altLang="en-US"/>
-          </a:p>
-        </p:txBody>
-      </p:sp>
-      <p:sp>
-        <p:nvSpPr>
-          <p:cNvPr id="27" name="文本框 26"/>
-          <p:cNvSpPr txBox="1"/>
-          <p:nvPr/>
-        </p:nvSpPr>
-        <p:spPr>
-          <a:xfrm>
-            <a:off x="1562100" y="4398010"/>
-            <a:ext cx="5314950" cy="368300"/>
-          </a:xfrm>
-          <a:prstGeom prst="rect">
-            <a:avLst/>
-          </a:prstGeom>
-          <a:noFill/>
-        </p:spPr>
-        <p:txBody>
-          <a:bodyPr wrap="square" rtlCol="0">
-            <a:spAutoFit/>
-          </a:bodyPr>
-          <a:p>
-            <a:r>
-              <a:rPr lang="zh-CN" altLang="en-US"/>
-              <a:t>持有的骰子显示在左侧列表</a:t>
-            </a:r>
-            <a:endParaRPr lang="zh-CN" altLang="en-US"/>
-          </a:p>
-        </p:txBody>
-      </p:sp>
-      <p:sp>
-        <p:nvSpPr>
-          <p:cNvPr id="28" name="文本框 27"/>
-          <p:cNvSpPr txBox="1"/>
-          <p:nvPr/>
-        </p:nvSpPr>
-        <p:spPr>
-          <a:xfrm>
-            <a:off x="8502650" y="2176145"/>
-            <a:ext cx="2534285" cy="368300"/>
-          </a:xfrm>
-          <a:prstGeom prst="rect">
-            <a:avLst/>
-          </a:prstGeom>
-          <a:noFill/>
-        </p:spPr>
-        <p:txBody>
-          <a:bodyPr wrap="square" rtlCol="0">
-            <a:spAutoFit/>
-          </a:bodyPr>
-          <a:p>
-            <a:r>
-              <a:rPr lang="zh-CN" altLang="en-US"/>
-              <a:t>这个是强化的效果</a:t>
-            </a:r>
-            <a:endParaRPr lang="zh-CN" altLang="en-US"/>
-          </a:p>
-        </p:txBody>
-      </p:sp>
-      <p:sp>
-        <p:nvSpPr>
           <p:cNvPr id="49" name="剪去单角的矩形 48"/>
           <p:cNvSpPr/>
           <p:nvPr/>
@@ -7022,277 +6927,6 @@
             <a:r>
               <a:rPr lang="zh-CN" altLang="en-US"/>
               <a:t>强化</a:t>
-            </a:r>
-            <a:endParaRPr lang="zh-CN" altLang="en-US"/>
-          </a:p>
-        </p:txBody>
-      </p:sp>
-      <p:cxnSp>
-        <p:nvCxnSpPr>
-          <p:cNvPr id="56" name="直接箭头连接符 55"/>
-          <p:cNvCxnSpPr/>
-          <p:nvPr/>
-        </p:nvCxnSpPr>
-        <p:spPr>
-          <a:xfrm flipH="1" flipV="1">
-            <a:off x="10518140" y="2027555"/>
-            <a:ext cx="46990" cy="294005"/>
-          </a:xfrm>
-          <a:prstGeom prst="straightConnector1">
-            <a:avLst/>
-          </a:prstGeom>
-          <a:ln>
-            <a:solidFill>
-              <a:schemeClr val="tx1"/>
-            </a:solidFill>
-            <a:tailEnd type="arrow"/>
-          </a:ln>
-        </p:spPr>
-        <p:style>
-          <a:lnRef idx="2">
-            <a:schemeClr val="accent1"/>
-          </a:lnRef>
-          <a:fillRef idx="0">
-            <a:srgbClr val="FFFFFF"/>
-          </a:fillRef>
-          <a:effectRef idx="0">
-            <a:srgbClr val="FFFFFF"/>
-          </a:effectRef>
-          <a:fontRef idx="minor">
-            <a:schemeClr val="tx1"/>
-          </a:fontRef>
-        </p:style>
-      </p:cxnSp>
-      <p:cxnSp>
-        <p:nvCxnSpPr>
-          <p:cNvPr id="29" name="直接箭头连接符 28"/>
-          <p:cNvCxnSpPr/>
-          <p:nvPr/>
-        </p:nvCxnSpPr>
-        <p:spPr>
-          <a:xfrm flipH="1" flipV="1">
-            <a:off x="2971165" y="4047490"/>
-            <a:ext cx="46990" cy="294005"/>
-          </a:xfrm>
-          <a:prstGeom prst="straightConnector1">
-            <a:avLst/>
-          </a:prstGeom>
-          <a:ln>
-            <a:solidFill>
-              <a:schemeClr val="tx1"/>
-            </a:solidFill>
-            <a:tailEnd type="arrow"/>
-          </a:ln>
-        </p:spPr>
-        <p:style>
-          <a:lnRef idx="2">
-            <a:schemeClr val="accent1"/>
-          </a:lnRef>
-          <a:fillRef idx="0">
-            <a:srgbClr val="FFFFFF"/>
-          </a:fillRef>
-          <a:effectRef idx="0">
-            <a:srgbClr val="FFFFFF"/>
-          </a:effectRef>
-          <a:fontRef idx="minor">
-            <a:schemeClr val="tx1"/>
-          </a:fontRef>
-        </p:style>
-      </p:cxnSp>
-      <p:cxnSp>
-        <p:nvCxnSpPr>
-          <p:cNvPr id="30" name="直接箭头连接符 29"/>
-          <p:cNvCxnSpPr/>
-          <p:nvPr/>
-        </p:nvCxnSpPr>
-        <p:spPr>
-          <a:xfrm flipH="1" flipV="1">
-            <a:off x="1005840" y="3486150"/>
-            <a:ext cx="435610" cy="1564005"/>
-          </a:xfrm>
-          <a:prstGeom prst="straightConnector1">
-            <a:avLst/>
-          </a:prstGeom>
-          <a:ln>
-            <a:solidFill>
-              <a:schemeClr val="tx1"/>
-            </a:solidFill>
-            <a:tailEnd type="arrow"/>
-          </a:ln>
-        </p:spPr>
-        <p:style>
-          <a:lnRef idx="2">
-            <a:schemeClr val="accent1"/>
-          </a:lnRef>
-          <a:fillRef idx="0">
-            <a:srgbClr val="FFFFFF"/>
-          </a:fillRef>
-          <a:effectRef idx="0">
-            <a:srgbClr val="FFFFFF"/>
-          </a:effectRef>
-          <a:fontRef idx="minor">
-            <a:schemeClr val="tx1"/>
-          </a:fontRef>
-        </p:style>
-      </p:cxnSp>
-      <p:cxnSp>
-        <p:nvCxnSpPr>
-          <p:cNvPr id="31" name="直接箭头连接符 30"/>
-          <p:cNvCxnSpPr/>
-          <p:nvPr/>
-        </p:nvCxnSpPr>
-        <p:spPr>
-          <a:xfrm flipH="1" flipV="1">
-            <a:off x="2422525" y="1577975"/>
-            <a:ext cx="1786255" cy="2452370"/>
-          </a:xfrm>
-          <a:prstGeom prst="straightConnector1">
-            <a:avLst/>
-          </a:prstGeom>
-          <a:ln>
-            <a:solidFill>
-              <a:schemeClr val="tx1"/>
-            </a:solidFill>
-            <a:tailEnd type="arrow"/>
-          </a:ln>
-        </p:spPr>
-        <p:style>
-          <a:lnRef idx="2">
-            <a:schemeClr val="accent1"/>
-          </a:lnRef>
-          <a:fillRef idx="0">
-            <a:srgbClr val="FFFFFF"/>
-          </a:fillRef>
-          <a:effectRef idx="0">
-            <a:srgbClr val="FFFFFF"/>
-          </a:effectRef>
-          <a:fontRef idx="minor">
-            <a:schemeClr val="tx1"/>
-          </a:fontRef>
-        </p:style>
-      </p:cxnSp>
-      <p:sp>
-        <p:nvSpPr>
-          <p:cNvPr id="33" name="文本框 32"/>
-          <p:cNvSpPr txBox="1"/>
-          <p:nvPr/>
-        </p:nvSpPr>
-        <p:spPr>
-          <a:xfrm>
-            <a:off x="822325" y="5076825"/>
-            <a:ext cx="4064000" cy="645160"/>
-          </a:xfrm>
-          <a:prstGeom prst="rect">
-            <a:avLst/>
-          </a:prstGeom>
-          <a:noFill/>
-        </p:spPr>
-        <p:txBody>
-          <a:bodyPr wrap="square" rtlCol="0">
-            <a:spAutoFit/>
-          </a:bodyPr>
-          <a:p>
-            <a:r>
-              <a:rPr lang="zh-CN" altLang="en-US" sz="1200"/>
-              <a:t>如果是强化的整个骰子，点击骰子图片后整个骰子项会变成强化后的面板，点击其他骰子时这个效果会转移到其他身上</a:t>
-            </a:r>
-            <a:endParaRPr lang="zh-CN" altLang="en-US" sz="1200"/>
-          </a:p>
-        </p:txBody>
-      </p:sp>
-      <p:sp>
-        <p:nvSpPr>
-          <p:cNvPr id="34" name="文本框 33"/>
-          <p:cNvSpPr txBox="1"/>
-          <p:nvPr/>
-        </p:nvSpPr>
-        <p:spPr>
-          <a:xfrm>
-            <a:off x="3018155" y="3970020"/>
-            <a:ext cx="4064000" cy="460375"/>
-          </a:xfrm>
-          <a:prstGeom prst="rect">
-            <a:avLst/>
-          </a:prstGeom>
-          <a:noFill/>
-        </p:spPr>
-        <p:txBody>
-          <a:bodyPr wrap="square" rtlCol="0">
-            <a:spAutoFit/>
-          </a:bodyPr>
-          <a:p>
-            <a:r>
-              <a:rPr lang="zh-CN" altLang="en-US" sz="1200"/>
-              <a:t>如果强化的是某一个面，则只有这个面会变成强化后的状态，且后面的概率、区间显示也会改变</a:t>
-            </a:r>
-            <a:r>
-              <a:rPr lang="en-US" altLang="zh-CN" sz="1200"/>
-              <a:t>……</a:t>
-            </a:r>
-            <a:endParaRPr lang="en-US" altLang="zh-CN" sz="1200"/>
-          </a:p>
-        </p:txBody>
-      </p:sp>
-      <p:cxnSp>
-        <p:nvCxnSpPr>
-          <p:cNvPr id="35" name="直接箭头连接符 34"/>
-          <p:cNvCxnSpPr/>
-          <p:nvPr/>
-        </p:nvCxnSpPr>
-        <p:spPr>
-          <a:xfrm flipH="1" flipV="1">
-            <a:off x="10013315" y="4853940"/>
-            <a:ext cx="46990" cy="294005"/>
-          </a:xfrm>
-          <a:prstGeom prst="straightConnector1">
-            <a:avLst/>
-          </a:prstGeom>
-          <a:ln>
-            <a:solidFill>
-              <a:schemeClr val="tx1"/>
-            </a:solidFill>
-            <a:tailEnd type="arrow"/>
-          </a:ln>
-        </p:spPr>
-        <p:style>
-          <a:lnRef idx="2">
-            <a:schemeClr val="accent1"/>
-          </a:lnRef>
-          <a:fillRef idx="0">
-            <a:srgbClr val="FFFFFF"/>
-          </a:fillRef>
-          <a:effectRef idx="0">
-            <a:srgbClr val="FFFFFF"/>
-          </a:effectRef>
-          <a:fontRef idx="minor">
-            <a:schemeClr val="tx1"/>
-          </a:fontRef>
-        </p:style>
-      </p:cxnSp>
-      <p:sp>
-        <p:nvSpPr>
-          <p:cNvPr id="39" name="文本框 38"/>
-          <p:cNvSpPr txBox="1"/>
-          <p:nvPr/>
-        </p:nvSpPr>
-        <p:spPr>
-          <a:xfrm>
-            <a:off x="8998585" y="5147945"/>
-            <a:ext cx="2534285" cy="922020"/>
-          </a:xfrm>
-          <a:prstGeom prst="rect">
-            <a:avLst/>
-          </a:prstGeom>
-          <a:noFill/>
-        </p:spPr>
-        <p:txBody>
-          <a:bodyPr wrap="square" rtlCol="0">
-            <a:spAutoFit/>
-          </a:bodyPr>
-          <a:p>
-            <a:r>
-              <a:rPr lang="zh-CN" altLang="en-US"/>
-              <a:t>点击了这个按钮之后会完成强化，并离开这个页面</a:t>
             </a:r>
             <a:endParaRPr lang="zh-CN" altLang="en-US"/>
           </a:p>
@@ -13933,7 +13567,7 @@
         </p:nvSpPr>
         <p:spPr>
           <a:xfrm>
-            <a:off x="3729990" y="2670175"/>
+            <a:off x="3729990" y="2694940"/>
             <a:ext cx="1144905" cy="1144905"/>
           </a:xfrm>
           <a:prstGeom prst="rect">
@@ -18316,6 +17950,96 @@
           </a:p>
         </p:txBody>
       </p:sp>
+      <p:cxnSp>
+        <p:nvCxnSpPr>
+          <p:cNvPr id="10" name="直接连接符 9"/>
+          <p:cNvCxnSpPr/>
+          <p:nvPr/>
+        </p:nvCxnSpPr>
+        <p:spPr>
+          <a:xfrm flipV="1">
+            <a:off x="20320" y="3190240"/>
+            <a:ext cx="5283200" cy="3624580"/>
+          </a:xfrm>
+          <a:prstGeom prst="line">
+            <a:avLst/>
+          </a:prstGeom>
+        </p:spPr>
+        <p:style>
+          <a:lnRef idx="2">
+            <a:schemeClr val="accent1"/>
+          </a:lnRef>
+          <a:fillRef idx="0">
+            <a:srgbClr val="FFFFFF"/>
+          </a:fillRef>
+          <a:effectRef idx="0">
+            <a:srgbClr val="FFFFFF"/>
+          </a:effectRef>
+          <a:fontRef idx="minor">
+            <a:schemeClr val="tx1"/>
+          </a:fontRef>
+        </p:style>
+      </p:cxnSp>
+      <p:cxnSp>
+        <p:nvCxnSpPr>
+          <p:cNvPr id="11" name="直接连接符 10"/>
+          <p:cNvCxnSpPr/>
+          <p:nvPr/>
+        </p:nvCxnSpPr>
+        <p:spPr>
+          <a:xfrm flipH="1">
+            <a:off x="5330190" y="3169920"/>
+            <a:ext cx="7636510" cy="67945"/>
+          </a:xfrm>
+          <a:prstGeom prst="line">
+            <a:avLst/>
+          </a:prstGeom>
+        </p:spPr>
+        <p:style>
+          <a:lnRef idx="2">
+            <a:schemeClr val="accent1"/>
+          </a:lnRef>
+          <a:fillRef idx="0">
+            <a:srgbClr val="FFFFFF"/>
+          </a:fillRef>
+          <a:effectRef idx="0">
+            <a:srgbClr val="FFFFFF"/>
+          </a:effectRef>
+          <a:fontRef idx="minor">
+            <a:schemeClr val="tx1"/>
+          </a:fontRef>
+        </p:style>
+      </p:cxnSp>
+      <p:cxnSp>
+        <p:nvCxnSpPr>
+          <p:cNvPr id="12" name="直接连接符 11"/>
+          <p:cNvCxnSpPr/>
+          <p:nvPr/>
+        </p:nvCxnSpPr>
+        <p:spPr>
+          <a:xfrm flipH="1">
+            <a:off x="5275580" y="62230"/>
+            <a:ext cx="6985" cy="3175635"/>
+          </a:xfrm>
+          <a:prstGeom prst="line">
+            <a:avLst/>
+          </a:prstGeom>
+        </p:spPr>
+        <p:style>
+          <a:lnRef idx="2">
+            <a:schemeClr val="accent1"/>
+          </a:lnRef>
+          <a:fillRef idx="0">
+            <a:srgbClr val="FFFFFF"/>
+          </a:fillRef>
+          <a:effectRef idx="0">
+            <a:srgbClr val="FFFFFF"/>
+          </a:effectRef>
+          <a:fontRef idx="minor">
+            <a:schemeClr val="tx1"/>
+          </a:fontRef>
+        </p:style>
+      </p:cxnSp>
     </p:spTree>
   </p:cSld>
   <p:clrMapOvr>
